--- a/3.3/1.pptx
+++ b/3.3/1.pptx
@@ -1,9 +1,12 @@
 
 <file path=ppt/presentation.xml><?xml version="1.0" encoding="utf-8"?>
-<p:presentation xmlns:a="http://schemas.openxmlformats.org/drawingml/2006/main" xmlns:r="http://schemas.openxmlformats.org/officeDocument/2006/relationships" xmlns:p="http://schemas.openxmlformats.org/presentationml/2006/main" saveSubsetFonts="true" autoCompressPictures="0" embedTrueTypeFonts="true">
+<p:presentation xmlns:a="http://schemas.openxmlformats.org/drawingml/2006/main" xmlns:r="http://schemas.openxmlformats.org/officeDocument/2006/relationships" xmlns:p="http://schemas.openxmlformats.org/presentationml/2006/main" embedTrueTypeFonts="1" saveSubsetFonts="1" autoCompressPictures="0">
   <p:sldMasterIdLst>
     <p:sldMasterId id="2147483648" r:id="rId1"/>
   </p:sldMasterIdLst>
+  <p:notesMasterIdLst>
+    <p:notesMasterId r:id="rId12"/>
+  </p:notesMasterIdLst>
   <p:sldIdLst>
     <p:sldId id="256" r:id="rId2"/>
     <p:sldId id="257" r:id="rId3"/>
@@ -16,23 +19,20 @@
     <p:sldId id="264" r:id="rId10"/>
     <p:sldId id="265" r:id="rId11"/>
   </p:sldIdLst>
-  <p:notesMasterIdLst>
-    <p:notesMasterId r:id="rId12"/>
-  </p:notesMasterIdLst>
-  <p:sldSz cx="12191695" cy="6858000"/>
-  <p:notesSz cx="6858000" cy="12191695"/>
+  <p:sldSz cx="12192000" cy="6858000"/>
+  <p:notesSz cx="6858000" cy="12192000"/>
   <p:embeddedFontLst>
     <p:embeddedFont>
-      <p:font typeface="Montserrat Bold"/>
-      <p:regular r:id="rId201314"/>
+      <p:font typeface="Montserrat Bold" panose="020B0604020202020204" charset="-52"/>
+      <p:regular r:id="rId13"/>
     </p:embeddedFont>
     <p:embeddedFont>
-      <p:font typeface="Open Sans Bold"/>
-      <p:regular r:id="rId201315"/>
+      <p:font typeface="Open Sans" panose="020B0606030504020204" pitchFamily="34" charset="0"/>
+      <p:regular r:id="rId14"/>
     </p:embeddedFont>
     <p:embeddedFont>
-      <p:font typeface="Open Sans"/>
-      <p:regular r:id="rId201316"/>
+      <p:font typeface="Open Sans Bold" panose="020B0806030504020204" charset="0"/>
+      <p:regular r:id="rId15"/>
     </p:embeddedFont>
   </p:embeddedFontLst>
   <p:defaultTextStyle>
@@ -127,6 +127,11 @@
       </a:defRPr>
     </a:lvl9pPr>
   </p:defaultTextStyle>
+  <p:extLst>
+    <p:ext uri="{EFAFB233-063F-42B5-8137-9DF3F51BA10A}">
+      <p15:sldGuideLst xmlns:p15="http://schemas.microsoft.com/office/powerpoint/2012/main"/>
+    </p:ext>
+  </p:extLst>
 </p:presentation>
 </file>
 
@@ -152,234 +157,10 @@
           <a:chExt cx="0" cy="0"/>
         </a:xfrm>
       </p:grpSpPr>
-      <p:sp>
-        <p:nvSpPr>
-          <p:cNvPr id="2" name="Header Placeholder 1"/>
-          <p:cNvSpPr>
-            <a:spLocks noGrp="1"/>
-          </p:cNvSpPr>
-          <p:nvPr>
-            <p:ph type="hdr" sz="quarter"/>
-          </p:nvPr>
-        </p:nvSpPr>
-        <p:spPr>
-          <a:xfrm>
-            <a:off x="0" y="0"/>
-            <a:ext cx="2971800" cy="458788"/>
-          </a:xfrm>
-          <a:prstGeom prst="rect">
-            <a:avLst/>
-          </a:prstGeom>
-        </p:spPr>
-        <p:txBody>
-          <a:bodyPr vert="horz" lIns="91440" tIns="45720" rIns="91440" bIns="45720" rtlCol="0"/>
-          <a:lstStyle>
-            <a:lvl1pPr algn="l">
-              <a:defRPr sz="1200"/>
-            </a:lvl1pPr>
-          </a:lstStyle>
-          <a:p>
-            <a:endParaRPr lang="en-US"/>
-          </a:p>
-        </p:txBody>
-      </p:sp>
-      <p:sp>
-        <p:nvSpPr>
-          <p:cNvPr id="3" name="Date Placeholder 2"/>
-          <p:cNvSpPr>
-            <a:spLocks noGrp="1"/>
-          </p:cNvSpPr>
-          <p:nvPr>
-            <p:ph type="dt" idx="1"/>
-          </p:nvPr>
-        </p:nvSpPr>
-        <p:spPr>
-          <a:xfrm>
-            <a:off x="3884613" y="0"/>
-            <a:ext cx="2971800" cy="458788"/>
-          </a:xfrm>
-          <a:prstGeom prst="rect">
-            <a:avLst/>
-          </a:prstGeom>
-        </p:spPr>
-        <p:txBody>
-          <a:bodyPr vert="horz" lIns="91440" tIns="45720" rIns="91440" bIns="45720" rtlCol="0"/>
-          <a:lstStyle>
-            <a:lvl1pPr algn="r">
-              <a:defRPr sz="1200"/>
-            </a:lvl1pPr>
-          </a:lstStyle>
-          <a:p>
-            <a:fld id="{5282F153-3F37-0F45-9E97-73ACFA13230C}" type="datetimeFigureOut">
-              <a:rPr lang="en-US"/>
-              <a:t>7/23/19</a:t>
-            </a:fld>
-            <a:endParaRPr lang="en-US"/>
-          </a:p>
-        </p:txBody>
-      </p:sp>
-      <p:sp>
-        <p:nvSpPr>
-          <p:cNvPr id="4" name="Slide Image Placeholder 3"/>
-          <p:cNvSpPr>
-            <a:spLocks noGrp="1" noRot="1" noChangeAspect="1"/>
-          </p:cNvSpPr>
-          <p:nvPr>
-            <p:ph type="sldImg" idx="2"/>
-          </p:nvPr>
-        </p:nvSpPr>
-        <p:spPr>
-          <a:xfrm>
-            <a:off x="685800" y="1143000"/>
-            <a:ext cx="5486400" cy="3086100"/>
-          </a:xfrm>
-          <a:prstGeom prst="rect">
-            <a:avLst/>
-          </a:prstGeom>
-          <a:noFill/>
-          <a:ln w="12700">
-            <a:solidFill>
-              <a:prstClr val="black"/>
-            </a:solidFill>
-          </a:ln>
-        </p:spPr>
-        <p:txBody>
-          <a:bodyPr vert="horz" lIns="91440" tIns="45720" rIns="91440" bIns="45720" rtlCol="0" anchor="ctr"/>
-          <a:lstStyle/>
-          <a:p>
-            <a:endParaRPr lang="en-US"/>
-          </a:p>
-        </p:txBody>
-      </p:sp>
-      <p:sp>
-        <p:nvSpPr>
-          <p:cNvPr id="5" name="Notes Placeholder 4"/>
-          <p:cNvSpPr>
-            <a:spLocks noGrp="1"/>
-          </p:cNvSpPr>
-          <p:nvPr>
-            <p:ph type="body" sz="quarter" idx="3"/>
-          </p:nvPr>
-        </p:nvSpPr>
-        <p:spPr>
-          <a:xfrm>
-            <a:off x="685800" y="4400550"/>
-            <a:ext cx="5486400" cy="3600450"/>
-          </a:xfrm>
-          <a:prstGeom prst="rect">
-            <a:avLst/>
-          </a:prstGeom>
-        </p:spPr>
-        <p:txBody>
-          <a:bodyPr vert="horz" lIns="91440" tIns="45720" rIns="91440" bIns="45720" rtlCol="0"/>
-          <a:lstStyle/>
-          <a:p>
-            <a:pPr lvl="0"/>
-            <a:r>
-              <a:rPr lang="en-US"/>
-              <a:t>Click to edit Master text styles</a:t>
-            </a:r>
-          </a:p>
-          <a:p>
-            <a:pPr lvl="1"/>
-            <a:r>
-              <a:rPr lang="en-US"/>
-              <a:t>Second level</a:t>
-            </a:r>
-          </a:p>
-          <a:p>
-            <a:pPr lvl="2"/>
-            <a:r>
-              <a:rPr lang="en-US"/>
-              <a:t>Third level</a:t>
-            </a:r>
-          </a:p>
-          <a:p>
-            <a:pPr lvl="3"/>
-            <a:r>
-              <a:rPr lang="en-US"/>
-              <a:t>Fourth level</a:t>
-            </a:r>
-          </a:p>
-          <a:p>
-            <a:pPr lvl="4"/>
-            <a:r>
-              <a:rPr lang="en-US"/>
-              <a:t>Fifth level</a:t>
-            </a:r>
-          </a:p>
-        </p:txBody>
-      </p:sp>
-      <p:sp>
-        <p:nvSpPr>
-          <p:cNvPr id="6" name="Footer Placeholder 5"/>
-          <p:cNvSpPr>
-            <a:spLocks noGrp="1"/>
-          </p:cNvSpPr>
-          <p:nvPr>
-            <p:ph type="ftr" sz="quarter" idx="4"/>
-          </p:nvPr>
-        </p:nvSpPr>
-        <p:spPr>
-          <a:xfrm>
-            <a:off x="0" y="8685213"/>
-            <a:ext cx="2971800" cy="458787"/>
-          </a:xfrm>
-          <a:prstGeom prst="rect">
-            <a:avLst/>
-          </a:prstGeom>
-        </p:spPr>
-        <p:txBody>
-          <a:bodyPr vert="horz" lIns="91440" tIns="45720" rIns="91440" bIns="45720" rtlCol="0" anchor="b"/>
-          <a:lstStyle>
-            <a:lvl1pPr algn="l">
-              <a:defRPr sz="1200"/>
-            </a:lvl1pPr>
-          </a:lstStyle>
-          <a:p>
-            <a:endParaRPr lang="en-US"/>
-          </a:p>
-        </p:txBody>
-      </p:sp>
-      <p:sp>
-        <p:nvSpPr>
-          <p:cNvPr id="7" name="Slide Number Placeholder 6"/>
-          <p:cNvSpPr>
-            <a:spLocks noGrp="1"/>
-          </p:cNvSpPr>
-          <p:nvPr>
-            <p:ph type="sldNum" sz="quarter" idx="5"/>
-          </p:nvPr>
-        </p:nvSpPr>
-        <p:spPr>
-          <a:xfrm>
-            <a:off x="3884613" y="8685213"/>
-            <a:ext cx="2971800" cy="458787"/>
-          </a:xfrm>
-          <a:prstGeom prst="rect">
-            <a:avLst/>
-          </a:prstGeom>
-        </p:spPr>
-        <p:txBody>
-          <a:bodyPr vert="horz" lIns="91440" tIns="45720" rIns="91440" bIns="45720" rtlCol="0" anchor="b"/>
-          <a:lstStyle>
-            <a:lvl1pPr algn="r">
-              <a:defRPr sz="1200"/>
-            </a:lvl1pPr>
-          </a:lstStyle>
-          <a:p>
-            <a:fld id="{CE5E9CC1-C706-0F49-92D6-E571CC5EEA8F}" type="slidenum">
-              <a:rPr lang="en-US"/>
-              <a:t>‹#›</a:t>
-            </a:fld>
-            <a:endParaRPr lang="en-US"/>
-          </a:p>
-        </p:txBody>
-      </p:sp>
     </p:spTree>
     <p:extLst>
       <p:ext uri="{BB962C8B-B14F-4D97-AF65-F5344CB8AC3E}">
-        <p14:creationId xmlns:p14="http://schemas.microsoft.com/office/powerpoint/2010/main" val="1024086991"/>
+        <p14:creationId xmlns:p14="http://schemas.microsoft.com/office/powerpoint/2010/main" val="2079889485"/>
       </p:ext>
     </p:extLst>
   </p:cSld>
@@ -523,10 +304,6 @@
           <a:bodyPr/>
           <a:lstStyle/>
           <a:p>
-            <a:r>
-              <a:rPr lang="en-US" dirty="0"/>
-              <a:t/>
-            </a:r>
             <a:endParaRPr lang="en-US" dirty="0"/>
           </a:p>
         </p:txBody>
@@ -611,10 +388,6 @@
           <a:bodyPr/>
           <a:lstStyle/>
           <a:p>
-            <a:r>
-              <a:rPr lang="en-US" dirty="0"/>
-              <a:t/>
-            </a:r>
             <a:endParaRPr lang="en-US" dirty="0"/>
           </a:p>
         </p:txBody>
@@ -699,10 +472,6 @@
           <a:bodyPr/>
           <a:lstStyle/>
           <a:p>
-            <a:r>
-              <a:rPr lang="en-US" dirty="0"/>
-              <a:t/>
-            </a:r>
             <a:endParaRPr lang="en-US" dirty="0"/>
           </a:p>
         </p:txBody>
@@ -787,10 +556,6 @@
           <a:bodyPr/>
           <a:lstStyle/>
           <a:p>
-            <a:r>
-              <a:rPr lang="en-US" dirty="0"/>
-              <a:t/>
-            </a:r>
             <a:endParaRPr lang="en-US" dirty="0"/>
           </a:p>
         </p:txBody>
@@ -875,10 +640,6 @@
           <a:bodyPr/>
           <a:lstStyle/>
           <a:p>
-            <a:r>
-              <a:rPr lang="en-US" dirty="0"/>
-              <a:t/>
-            </a:r>
             <a:endParaRPr lang="en-US" dirty="0"/>
           </a:p>
         </p:txBody>
@@ -963,10 +724,6 @@
           <a:bodyPr/>
           <a:lstStyle/>
           <a:p>
-            <a:r>
-              <a:rPr lang="en-US" dirty="0"/>
-              <a:t/>
-            </a:r>
             <a:endParaRPr lang="en-US" dirty="0"/>
           </a:p>
         </p:txBody>
@@ -1051,10 +808,6 @@
           <a:bodyPr/>
           <a:lstStyle/>
           <a:p>
-            <a:r>
-              <a:rPr lang="en-US" dirty="0"/>
-              <a:t/>
-            </a:r>
             <a:endParaRPr lang="en-US" dirty="0"/>
           </a:p>
         </p:txBody>
@@ -1139,10 +892,6 @@
           <a:bodyPr/>
           <a:lstStyle/>
           <a:p>
-            <a:r>
-              <a:rPr lang="en-US" dirty="0"/>
-              <a:t/>
-            </a:r>
             <a:endParaRPr lang="en-US" dirty="0"/>
           </a:p>
         </p:txBody>
@@ -1227,10 +976,6 @@
           <a:bodyPr/>
           <a:lstStyle/>
           <a:p>
-            <a:r>
-              <a:rPr lang="en-US" dirty="0"/>
-              <a:t/>
-            </a:r>
             <a:endParaRPr lang="en-US" dirty="0"/>
           </a:p>
         </p:txBody>
@@ -1315,10 +1060,6 @@
           <a:bodyPr/>
           <a:lstStyle/>
           <a:p>
-            <a:r>
-              <a:rPr lang="en-US" dirty="0"/>
-              <a:t/>
-            </a:r>
             <a:endParaRPr lang="en-US" dirty="0"/>
           </a:p>
         </p:txBody>
@@ -1397,6 +1138,7 @@
         <a:solidFill>
           <a:srgbClr val="000000"/>
         </a:solidFill>
+        <a:effectLst/>
       </p:bgPr>
     </p:bg>
     <p:spTree>
@@ -1453,32 +1195,6 @@
           <a:ln/>
         </p:spPr>
       </p:sp>
-      <p:pic>
-        <p:nvPicPr>
-          <p:cNvPr id="4" name="Image 0" descr="preencoded.png">
-            <a:hlinkClick r:id="rId2" tooltip=""/>
-          </p:cNvPr>
-          <p:cNvPicPr>
-            <a:picLocks noChangeAspect="1"/>
-          </p:cNvPicPr>
-          <p:nvPr/>
-        </p:nvPicPr>
-        <p:blipFill>
-          <a:blip r:embed="rId1"/>
-          <a:stretch>
-            <a:fillRect/>
-          </a:stretch>
-        </p:blipFill>
-        <p:spPr>
-          <a:xfrm>
-            <a:off x="11076875" y="6558991"/>
-            <a:ext cx="1071843" cy="256032"/>
-          </a:xfrm>
-          <a:prstGeom prst="rect">
-            <a:avLst/>
-          </a:prstGeom>
-        </p:spPr>
-      </p:pic>
     </p:spTree>
   </p:cSld>
   <p:clrMapOvr>
@@ -1490,6 +1206,11 @@
 <file path=ppt/slideMasters/slideMaster1.xml><?xml version="1.0" encoding="utf-8"?>
 <p:sldMaster xmlns:a="http://schemas.openxmlformats.org/drawingml/2006/main" xmlns:r="http://schemas.openxmlformats.org/officeDocument/2006/relationships" xmlns:p="http://schemas.openxmlformats.org/presentationml/2006/main">
   <p:cSld>
+    <p:bg>
+      <p:bgRef idx="1001">
+        <a:schemeClr val="bg1"/>
+      </p:bgRef>
+    </p:bg>
     <p:spTree>
       <p:nvGrpSpPr>
         <p:cNvPr id="1" name=""/>
@@ -1804,14 +1525,14 @@
       </p:sp>
       <p:pic>
         <p:nvPicPr>
-          <p:cNvPr id="3" name="Image 0" descr="preencoded.png">    </p:cNvPr>
+          <p:cNvPr id="3" name="Image 0" descr="preencoded.png"/>
           <p:cNvPicPr>
             <a:picLocks noChangeAspect="1"/>
           </p:cNvPicPr>
           <p:nvPr/>
         </p:nvPicPr>
         <p:blipFill>
-          <a:blip r:embed="rId1"/>
+          <a:blip r:embed="rId3"/>
           <a:stretch>
             <a:fillRect/>
           </a:stretch>
@@ -1849,7 +1570,7 @@
           </a:bodyPr>
           <a:lstStyle/>
           <a:p>
-            <a:pPr algn="l" indent="0" marL="0">
+            <a:pPr marL="0" indent="0" algn="l">
               <a:lnSpc>
                 <a:spcPct val="104000"/>
               </a:lnSpc>
@@ -1893,7 +1614,7 @@
           </a:bodyPr>
           <a:lstStyle/>
           <a:p>
-            <a:pPr algn="l" indent="0" marL="0">
+            <a:pPr marL="0" indent="0" algn="l">
               <a:lnSpc>
                 <a:spcPct val="133000"/>
               </a:lnSpc>
@@ -1957,7 +1678,7 @@
           <a:bodyPr wrap="none" lIns="0" tIns="0" rIns="0" bIns="0" rtlCol="0" anchor="t"/>
           <a:lstStyle/>
           <a:p>
-            <a:pPr algn="l" indent="0" marL="0">
+            <a:pPr marL="0" indent="0" algn="l">
               <a:lnSpc>
                 <a:spcPct val="104000"/>
               </a:lnSpc>
@@ -2001,7 +1722,7 @@
           </a:bodyPr>
           <a:lstStyle/>
           <a:p>
-            <a:pPr algn="l" indent="0" marL="0">
+            <a:pPr marL="0" indent="0" algn="l">
               <a:lnSpc>
                 <a:spcPct val="133000"/>
               </a:lnSpc>
@@ -2068,7 +1789,7 @@
           <a:bodyPr wrap="none" lIns="0" tIns="0" rIns="0" bIns="0" rtlCol="0" anchor="t"/>
           <a:lstStyle/>
           <a:p>
-            <a:pPr algn="l" indent="0" marL="0">
+            <a:pPr marL="0" indent="0" algn="l">
               <a:lnSpc>
                 <a:spcPct val="104000"/>
               </a:lnSpc>
@@ -2110,7 +1831,7 @@
           <a:bodyPr wrap="none" lIns="0" tIns="0" rIns="0" bIns="0" rtlCol="0" anchor="t"/>
           <a:lstStyle/>
           <a:p>
-            <a:pPr algn="l" indent="0" marL="0">
+            <a:pPr marL="0" indent="0" algn="l">
               <a:lnSpc>
                 <a:spcPct val="113000"/>
               </a:lnSpc>
@@ -2133,14 +1854,14 @@
       </p:sp>
       <p:pic>
         <p:nvPicPr>
-          <p:cNvPr id="4" name="Image 0" descr="preencoded.png">    </p:cNvPr>
+          <p:cNvPr id="4" name="Image 0" descr="preencoded.png"/>
           <p:cNvPicPr>
             <a:picLocks noChangeAspect="1"/>
           </p:cNvPicPr>
           <p:nvPr/>
         </p:nvPicPr>
         <p:blipFill>
-          <a:blip r:embed="rId1"/>
+          <a:blip r:embed="rId3"/>
           <a:stretch>
             <a:fillRect/>
           </a:stretch>
@@ -2178,7 +1899,7 @@
           </a:bodyPr>
           <a:lstStyle/>
           <a:p>
-            <a:pPr algn="r" indent="0" marL="0">
+            <a:pPr marL="0" indent="0" algn="r">
               <a:lnSpc>
                 <a:spcPct val="104000"/>
               </a:lnSpc>
@@ -2220,7 +1941,7 @@
           <a:bodyPr wrap="none" lIns="0" tIns="0" rIns="0" bIns="0" rtlCol="0" anchor="t"/>
           <a:lstStyle/>
           <a:p>
-            <a:pPr algn="ctr" indent="0" marL="0">
+            <a:pPr marL="0" indent="0" algn="ctr">
               <a:lnSpc>
                 <a:spcPct val="104000"/>
               </a:lnSpc>
@@ -2262,7 +1983,7 @@
           <a:bodyPr wrap="none" lIns="0" tIns="0" rIns="0" bIns="0" rtlCol="0" anchor="t"/>
           <a:lstStyle/>
           <a:p>
-            <a:pPr algn="l" indent="0" marL="0">
+            <a:pPr marL="0" indent="0" algn="l">
               <a:lnSpc>
                 <a:spcPct val="104000"/>
               </a:lnSpc>
@@ -2306,7 +2027,7 @@
           </a:bodyPr>
           <a:lstStyle/>
           <a:p>
-            <a:pPr algn="ctr" indent="0" marL="0">
+            <a:pPr marL="0" indent="0" algn="ctr">
               <a:lnSpc>
                 <a:spcPct val="104000"/>
               </a:lnSpc>
@@ -2348,7 +2069,7 @@
           <a:bodyPr wrap="none" lIns="0" tIns="0" rIns="0" bIns="0" rtlCol="0" anchor="t"/>
           <a:lstStyle/>
           <a:p>
-            <a:pPr algn="l" indent="0" marL="0">
+            <a:pPr marL="0" indent="0" algn="l">
               <a:lnSpc>
                 <a:spcPct val="104000"/>
               </a:lnSpc>
@@ -2392,7 +2113,7 @@
           </a:bodyPr>
           <a:lstStyle/>
           <a:p>
-            <a:pPr algn="l" indent="0" marL="0">
+            <a:pPr marL="0" indent="0" algn="l">
               <a:lnSpc>
                 <a:spcPct val="113000"/>
               </a:lnSpc>
@@ -2434,7 +2155,7 @@
           <a:bodyPr wrap="none" lIns="0" tIns="0" rIns="0" bIns="0" rtlCol="0" anchor="t"/>
           <a:lstStyle/>
           <a:p>
-            <a:pPr algn="l" indent="0" marL="0">
+            <a:pPr marL="0" indent="0" algn="l">
               <a:lnSpc>
                 <a:spcPct val="104000"/>
               </a:lnSpc>
@@ -2478,7 +2199,7 @@
           </a:bodyPr>
           <a:lstStyle/>
           <a:p>
-            <a:pPr algn="l" indent="0" marL="0">
+            <a:pPr marL="0" indent="0" algn="l">
               <a:lnSpc>
                 <a:spcPct val="113000"/>
               </a:lnSpc>
@@ -2520,7 +2241,7 @@
           <a:bodyPr wrap="none" lIns="0" tIns="0" rIns="0" bIns="0" rtlCol="0" anchor="t"/>
           <a:lstStyle/>
           <a:p>
-            <a:pPr algn="l" indent="0" marL="0">
+            <a:pPr marL="0" indent="0" algn="l">
               <a:lnSpc>
                 <a:spcPct val="104000"/>
               </a:lnSpc>
@@ -2564,7 +2285,7 @@
           </a:bodyPr>
           <a:lstStyle/>
           <a:p>
-            <a:pPr algn="l" indent="0" marL="0">
+            <a:pPr marL="0" indent="0" algn="l">
               <a:lnSpc>
                 <a:spcPct val="113000"/>
               </a:lnSpc>
@@ -2691,7 +2412,7 @@
           <a:bodyPr wrap="none" lIns="0" tIns="0" rIns="0" bIns="0" rtlCol="0" anchor="t"/>
           <a:lstStyle/>
           <a:p>
-            <a:pPr algn="l" indent="0" marL="0">
+            <a:pPr marL="0" indent="0" algn="l">
               <a:lnSpc>
                 <a:spcPct val="104000"/>
               </a:lnSpc>
@@ -2714,14 +2435,14 @@
       </p:sp>
       <p:pic>
         <p:nvPicPr>
-          <p:cNvPr id="3" name="Image 0" descr="preencoded.png">    </p:cNvPr>
+          <p:cNvPr id="3" name="Image 0" descr="preencoded.png"/>
           <p:cNvPicPr>
             <a:picLocks noChangeAspect="1"/>
           </p:cNvPicPr>
           <p:nvPr/>
         </p:nvPicPr>
         <p:blipFill>
-          <a:blip r:embed="rId1"/>
+          <a:blip r:embed="rId3"/>
           <a:stretch>
             <a:fillRect/>
           </a:stretch>
@@ -2759,7 +2480,7 @@
           </a:bodyPr>
           <a:lstStyle/>
           <a:p>
-            <a:pPr algn="l" indent="0" marL="0">
+            <a:pPr marL="0" indent="0" algn="l">
               <a:lnSpc>
                 <a:spcPct val="133000"/>
               </a:lnSpc>
@@ -2804,14 +2525,14 @@
       </p:sp>
       <p:pic>
         <p:nvPicPr>
-          <p:cNvPr id="6" name="Image 1" descr="preencoded.png">    </p:cNvPr>
+          <p:cNvPr id="6" name="Image 1" descr="preencoded.png"/>
           <p:cNvPicPr>
             <a:picLocks noChangeAspect="1"/>
           </p:cNvPicPr>
           <p:nvPr/>
         </p:nvPicPr>
         <p:blipFill>
-          <a:blip r:embed="rId2"/>
+          <a:blip r:embed="rId4"/>
           <a:stretch>
             <a:fillRect/>
           </a:stretch>
@@ -2849,7 +2570,7 @@
           </a:bodyPr>
           <a:lstStyle/>
           <a:p>
-            <a:pPr algn="l" indent="0" marL="0">
+            <a:pPr marL="0" indent="0" algn="l">
               <a:lnSpc>
                 <a:spcPct val="133000"/>
               </a:lnSpc>
@@ -2866,12 +2587,6 @@
               </a:rPr>
               <a:t>Задайте себе вопрос: </a:t>
             </a:r>
-            <a:pPr algn="l" indent="0" marL="0">
-              <a:lnSpc>
-                <a:spcPct val="133000"/>
-              </a:lnSpc>
-              <a:buNone/>
-            </a:pPr>
             <a:r>
               <a:rPr lang="en-US" sz="1450" b="1" dirty="0">
                 <a:solidFill>
@@ -2883,12 +2598,6 @@
               </a:rPr>
               <a:t>смогу ли я определить условия проверки и ожидаемый результат без предположений?</a:t>
             </a:r>
-            <a:pPr algn="l" indent="0" marL="0">
-              <a:lnSpc>
-                <a:spcPct val="133000"/>
-              </a:lnSpc>
-              <a:buNone/>
-            </a:pPr>
             <a:r>
               <a:rPr lang="en-US" sz="1450" dirty="0">
                 <a:solidFill>
@@ -2951,14 +2660,14 @@
       </p:sp>
       <p:pic>
         <p:nvPicPr>
-          <p:cNvPr id="3" name="Image 0" descr="preencoded.png">    </p:cNvPr>
+          <p:cNvPr id="3" name="Image 0" descr="preencoded.png"/>
           <p:cNvPicPr>
             <a:picLocks noChangeAspect="1"/>
           </p:cNvPicPr>
           <p:nvPr/>
         </p:nvPicPr>
         <p:blipFill>
-          <a:blip r:embed="rId1"/>
+          <a:blip r:embed="rId3"/>
           <a:stretch>
             <a:fillRect/>
           </a:stretch>
@@ -2996,7 +2705,7 @@
           </a:bodyPr>
           <a:lstStyle/>
           <a:p>
-            <a:pPr algn="l" indent="0" marL="0">
+            <a:pPr marL="0" indent="0" algn="l">
               <a:lnSpc>
                 <a:spcPct val="104000"/>
               </a:lnSpc>
@@ -3040,7 +2749,7 @@
           </a:bodyPr>
           <a:lstStyle/>
           <a:p>
-            <a:pPr algn="l" indent="0" marL="0">
+            <a:pPr marL="0" indent="0" algn="l">
               <a:lnSpc>
                 <a:spcPct val="130000"/>
               </a:lnSpc>
@@ -3063,17 +2772,17 @@
       </p:sp>
       <p:pic>
         <p:nvPicPr>
-          <p:cNvPr id="6" name="Image 1" descr="preencoded.png">    </p:cNvPr>
+          <p:cNvPr id="6" name="Image 1" descr="preencoded.png"/>
           <p:cNvPicPr>
             <a:picLocks noChangeAspect="1"/>
           </p:cNvPicPr>
           <p:nvPr/>
         </p:nvPicPr>
         <p:blipFill>
-          <a:blip r:embed="rId2">
+          <a:blip>
             <a:extLst>
               <a:ext uri="{96DAC541-7B7A-43D3-8B79-37D633B846F1}">
-                <asvg:svgBlip xmlns:asvg="http://schemas.microsoft.com/office/drawing/2016/SVG/main" r:embed="rId3"/>
+                <asvg:svgBlip xmlns:asvg="http://schemas.microsoft.com/office/drawing/2016/SVG/main" r:embed="rId4"/>
               </a:ext>
             </a:extLst>
           </a:blip>
@@ -3112,7 +2821,7 @@
           <a:bodyPr wrap="none" lIns="0" tIns="0" rIns="0" bIns="0" rtlCol="0" anchor="t"/>
           <a:lstStyle/>
           <a:p>
-            <a:pPr algn="l" indent="0" marL="0">
+            <a:pPr marL="0" indent="0" algn="l">
               <a:lnSpc>
                 <a:spcPct val="104000"/>
               </a:lnSpc>
@@ -3129,12 +2838,6 @@
               </a:rPr>
               <a:t>❌</a:t>
             </a:r>
-            <a:pPr algn="l" indent="0" marL="0">
-              <a:lnSpc>
-                <a:spcPct val="104000"/>
-              </a:lnSpc>
-              <a:buNone/>
-            </a:pPr>
             <a:r>
               <a:rPr lang="en-US" sz="1750" b="1" dirty="0">
                 <a:solidFill>
@@ -3173,7 +2876,7 @@
           </a:bodyPr>
           <a:lstStyle/>
           <a:p>
-            <a:pPr algn="l" indent="0" marL="0">
+            <a:pPr marL="0" indent="0" algn="l">
               <a:lnSpc>
                 <a:spcPct val="130000"/>
               </a:lnSpc>
@@ -3196,14 +2899,14 @@
       </p:sp>
       <p:pic>
         <p:nvPicPr>
-          <p:cNvPr id="9" name="Image 2" descr="preencoded.png">    </p:cNvPr>
+          <p:cNvPr id="9" name="Image 2" descr="preencoded.png"/>
           <p:cNvPicPr>
             <a:picLocks noChangeAspect="1"/>
           </p:cNvPicPr>
           <p:nvPr/>
         </p:nvPicPr>
         <p:blipFill>
-          <a:blip r:embed="rId4">
+          <a:blip>
             <a:extLst>
               <a:ext uri="{96DAC541-7B7A-43D3-8B79-37D633B846F1}">
                 <asvg:svgBlip xmlns:asvg="http://schemas.microsoft.com/office/drawing/2016/SVG/main" r:embed="rId5"/>
@@ -3245,7 +2948,7 @@
           <a:bodyPr wrap="none" lIns="0" tIns="0" rIns="0" bIns="0" rtlCol="0" anchor="t"/>
           <a:lstStyle/>
           <a:p>
-            <a:pPr algn="l" indent="0" marL="0">
+            <a:pPr marL="0" indent="0" algn="l">
               <a:lnSpc>
                 <a:spcPct val="104000"/>
               </a:lnSpc>
@@ -3262,12 +2965,6 @@
               </a:rPr>
               <a:t>✅</a:t>
             </a:r>
-            <a:pPr algn="l" indent="0" marL="0">
-              <a:lnSpc>
-                <a:spcPct val="104000"/>
-              </a:lnSpc>
-              <a:buNone/>
-            </a:pPr>
             <a:r>
               <a:rPr lang="en-US" sz="1750" b="1" dirty="0">
                 <a:solidFill>
@@ -3306,7 +3003,7 @@
           </a:bodyPr>
           <a:lstStyle/>
           <a:p>
-            <a:pPr algn="l" indent="0" marL="0">
+            <a:pPr marL="0" indent="0" algn="l">
               <a:lnSpc>
                 <a:spcPct val="130000"/>
               </a:lnSpc>
@@ -3373,7 +3070,7 @@
           <a:bodyPr wrap="none" lIns="0" tIns="0" rIns="0" bIns="0" rtlCol="0" anchor="t"/>
           <a:lstStyle/>
           <a:p>
-            <a:pPr algn="l" indent="0" marL="0">
+            <a:pPr marL="0" indent="0" algn="l">
               <a:lnSpc>
                 <a:spcPct val="104000"/>
               </a:lnSpc>
@@ -3417,7 +3114,7 @@
           </a:bodyPr>
           <a:lstStyle/>
           <a:p>
-            <a:pPr algn="l" indent="0" marL="0">
+            <a:pPr marL="0" indent="0" algn="l">
               <a:lnSpc>
                 <a:spcPct val="133000"/>
               </a:lnSpc>
@@ -3461,7 +3158,7 @@
           </a:bodyPr>
           <a:lstStyle/>
           <a:p>
-            <a:pPr algn="l" indent="0" marL="0">
+            <a:pPr marL="0" indent="0" algn="l">
               <a:lnSpc>
                 <a:spcPct val="133000"/>
               </a:lnSpc>
@@ -3527,7 +3224,7 @@
           </a:bodyPr>
           <a:lstStyle/>
           <a:p>
-            <a:pPr algn="l" indent="0" marL="0">
+            <a:pPr marL="0" indent="0" algn="l">
               <a:lnSpc>
                 <a:spcPct val="133000"/>
               </a:lnSpc>
@@ -3598,7 +3295,7 @@
           </a:bodyPr>
           <a:lstStyle/>
           <a:p>
-            <a:pPr algn="l" indent="0" marL="0">
+            <a:pPr marL="0" indent="0" algn="l">
               <a:lnSpc>
                 <a:spcPct val="104000"/>
               </a:lnSpc>
@@ -3669,7 +3366,7 @@
           </a:bodyPr>
           <a:lstStyle/>
           <a:p>
-            <a:pPr algn="l" indent="0" marL="0">
+            <a:pPr marL="0" indent="0" algn="l">
               <a:lnSpc>
                 <a:spcPct val="104000"/>
               </a:lnSpc>
@@ -3740,7 +3437,7 @@
           </a:bodyPr>
           <a:lstStyle/>
           <a:p>
-            <a:pPr algn="l" indent="0" marL="0">
+            <a:pPr marL="0" indent="0" algn="l">
               <a:lnSpc>
                 <a:spcPct val="104000"/>
               </a:lnSpc>
@@ -3809,7 +3506,7 @@
           <a:bodyPr wrap="none" lIns="0" tIns="0" rIns="0" bIns="0" rtlCol="0" anchor="t"/>
           <a:lstStyle/>
           <a:p>
-            <a:pPr algn="l" indent="0" marL="0">
+            <a:pPr marL="0" indent="0" algn="l">
               <a:lnSpc>
                 <a:spcPct val="104000"/>
               </a:lnSpc>
@@ -3853,7 +3550,7 @@
           </a:bodyPr>
           <a:lstStyle/>
           <a:p>
-            <a:pPr algn="l" indent="0" marL="0">
+            <a:pPr marL="0" indent="0" algn="l">
               <a:lnSpc>
                 <a:spcPct val="133000"/>
               </a:lnSpc>
@@ -3870,12 +3567,6 @@
               </a:rPr>
               <a:t>Полное требование описывает </a:t>
             </a:r>
-            <a:pPr algn="l" indent="0" marL="0">
-              <a:lnSpc>
-                <a:spcPct val="133000"/>
-              </a:lnSpc>
-              <a:buNone/>
-            </a:pPr>
             <a:r>
               <a:rPr lang="en-US" sz="1450" b="1" dirty="0">
                 <a:solidFill>
@@ -3887,12 +3578,6 @@
               </a:rPr>
               <a:t>наблюдаемый результат</a:t>
             </a:r>
-            <a:pPr algn="l" indent="0" marL="0">
-              <a:lnSpc>
-                <a:spcPct val="133000"/>
-              </a:lnSpc>
-              <a:buNone/>
-            </a:pPr>
             <a:r>
               <a:rPr lang="en-US" sz="1450" dirty="0">
                 <a:solidFill>
@@ -3955,14 +3640,14 @@
       </p:sp>
       <p:pic>
         <p:nvPicPr>
-          <p:cNvPr id="3" name="Image 0" descr="preencoded.png">    </p:cNvPr>
+          <p:cNvPr id="3" name="Image 0" descr="preencoded.png"/>
           <p:cNvPicPr>
             <a:picLocks noChangeAspect="1"/>
           </p:cNvPicPr>
           <p:nvPr/>
         </p:nvPicPr>
         <p:blipFill>
-          <a:blip r:embed="rId1"/>
+          <a:blip r:embed="rId3"/>
           <a:stretch>
             <a:fillRect/>
           </a:stretch>
@@ -4000,7 +3685,7 @@
           </a:bodyPr>
           <a:lstStyle/>
           <a:p>
-            <a:pPr algn="l" indent="0" marL="0">
+            <a:pPr marL="0" indent="0" algn="l">
               <a:lnSpc>
                 <a:spcPct val="104000"/>
               </a:lnSpc>
@@ -4044,7 +3729,7 @@
           </a:bodyPr>
           <a:lstStyle/>
           <a:p>
-            <a:pPr algn="l" indent="0" marL="0">
+            <a:pPr marL="0" indent="0" algn="l">
               <a:lnSpc>
                 <a:spcPct val="130000"/>
               </a:lnSpc>
@@ -4117,7 +3802,7 @@
                 <a:lnTo>
                   <a:pt x="6221311" y="0"/>
                 </a:lnTo>
-                <a:arcTo hR="62850" wR="62849" stAng="16200000" swAng="5400000"/>
+                <a:arcTo wR="62849" hR="62850" stAng="16200000" swAng="5400000"/>
                 <a:lnTo>
                   <a:pt x="6284160" y="1301948"/>
                 </a:lnTo>
@@ -4127,7 +3812,7 @@
                 <a:lnTo>
                   <a:pt x="0" y="62850"/>
                 </a:lnTo>
-                <a:arcTo hR="62850" wR="62849" stAng="10800000" swAng="5400000"/>
+                <a:arcTo wR="62849" hR="62850" stAng="10800000" swAng="5400000"/>
                 <a:close/>
               </a:path>
             </a:pathLst>
@@ -4159,7 +3844,7 @@
           <a:bodyPr wrap="none" lIns="0" tIns="0" rIns="0" bIns="0" rtlCol="0" anchor="t"/>
           <a:lstStyle/>
           <a:p>
-            <a:pPr algn="l" indent="0" marL="0">
+            <a:pPr marL="0" indent="0" algn="l">
               <a:lnSpc>
                 <a:spcPct val="104000"/>
               </a:lnSpc>
@@ -4176,12 +3861,6 @@
               </a:rPr>
               <a:t>❌</a:t>
             </a:r>
-            <a:pPr algn="l" indent="0" marL="0">
-              <a:lnSpc>
-                <a:spcPct val="104000"/>
-              </a:lnSpc>
-              <a:buNone/>
-            </a:pPr>
             <a:r>
               <a:rPr lang="en-US" sz="1750" b="1" dirty="0">
                 <a:solidFill>
@@ -4220,7 +3899,7 @@
           </a:bodyPr>
           <a:lstStyle/>
           <a:p>
-            <a:pPr algn="l" indent="0" marL="0">
+            <a:pPr marL="0" indent="0" algn="l">
               <a:lnSpc>
                 <a:spcPct val="130000"/>
               </a:lnSpc>
@@ -4237,12 +3916,6 @@
               </a:rPr>
               <a:t>«Страница должна загружаться </a:t>
             </a:r>
-            <a:pPr algn="l" indent="0" marL="0">
-              <a:lnSpc>
-                <a:spcPct val="130000"/>
-              </a:lnSpc>
-              <a:buNone/>
-            </a:pPr>
             <a:r>
               <a:rPr lang="en-US" sz="1400" b="1" dirty="0">
                 <a:solidFill>
@@ -4254,12 +3927,6 @@
               </a:rPr>
               <a:t>быстро</a:t>
             </a:r>
-            <a:pPr algn="l" indent="0" marL="0">
-              <a:lnSpc>
-                <a:spcPct val="130000"/>
-              </a:lnSpc>
-              <a:buNone/>
-            </a:pPr>
             <a:r>
               <a:rPr lang="en-US" sz="1400" dirty="0">
                 <a:solidFill>
@@ -4303,11 +3970,11 @@
                 <a:lnTo>
                   <a:pt x="6284160" y="1239098"/>
                 </a:lnTo>
-                <a:arcTo hR="62850" wR="62849" stAng="0" swAng="5400000"/>
+                <a:arcTo wR="62849" hR="62850" stAng="0" swAng="5400000"/>
                 <a:lnTo>
                   <a:pt x="62849" y="1301948"/>
                 </a:lnTo>
-                <a:arcTo hR="62850" wR="62849" stAng="5400000" swAng="5400000"/>
+                <a:arcTo wR="62849" hR="62850" stAng="5400000" swAng="5400000"/>
                 <a:lnTo>
                   <a:pt x="0" y="0"/>
                 </a:lnTo>
@@ -4364,7 +4031,7 @@
           <a:bodyPr wrap="none" lIns="0" tIns="0" rIns="0" bIns="0" rtlCol="0" anchor="t"/>
           <a:lstStyle/>
           <a:p>
-            <a:pPr algn="l" indent="0" marL="0">
+            <a:pPr marL="0" indent="0" algn="l">
               <a:lnSpc>
                 <a:spcPct val="104000"/>
               </a:lnSpc>
@@ -4381,12 +4048,6 @@
               </a:rPr>
               <a:t>✅</a:t>
             </a:r>
-            <a:pPr algn="l" indent="0" marL="0">
-              <a:lnSpc>
-                <a:spcPct val="104000"/>
-              </a:lnSpc>
-              <a:buNone/>
-            </a:pPr>
             <a:r>
               <a:rPr lang="en-US" sz="1750" b="1" dirty="0">
                 <a:solidFill>
@@ -4425,7 +4086,7 @@
           </a:bodyPr>
           <a:lstStyle/>
           <a:p>
-            <a:pPr algn="l" indent="0" marL="0">
+            <a:pPr marL="0" indent="0" algn="l">
               <a:lnSpc>
                 <a:spcPct val="130000"/>
               </a:lnSpc>
@@ -4442,12 +4103,6 @@
               </a:rPr>
               <a:t>«Страница загружается </a:t>
             </a:r>
-            <a:pPr algn="l" indent="0" marL="0">
-              <a:lnSpc>
-                <a:spcPct val="130000"/>
-              </a:lnSpc>
-              <a:buNone/>
-            </a:pPr>
             <a:r>
               <a:rPr lang="en-US" sz="1400" b="1" dirty="0">
                 <a:solidFill>
@@ -4459,12 +4114,6 @@
               </a:rPr>
               <a:t>не более чем за 2 секунды</a:t>
             </a:r>
-            <a:pPr algn="l" indent="0" marL="0">
-              <a:lnSpc>
-                <a:spcPct val="130000"/>
-              </a:lnSpc>
-              <a:buNone/>
-            </a:pPr>
             <a:r>
               <a:rPr lang="en-US" sz="1400" dirty="0">
                 <a:solidFill>
@@ -4526,7 +4175,7 @@
           <a:bodyPr wrap="none" lIns="0" tIns="0" rIns="0" bIns="0" rtlCol="0" anchor="t"/>
           <a:lstStyle/>
           <a:p>
-            <a:pPr algn="l" indent="0" marL="0">
+            <a:pPr marL="0" indent="0" algn="l">
               <a:lnSpc>
                 <a:spcPct val="104000"/>
               </a:lnSpc>
@@ -4549,14 +4198,14 @@
       </p:sp>
       <p:pic>
         <p:nvPicPr>
-          <p:cNvPr id="3" name="Image 0" descr="preencoded.png">    </p:cNvPr>
+          <p:cNvPr id="3" name="Image 0" descr="preencoded.png"/>
           <p:cNvPicPr>
             <a:picLocks noChangeAspect="1"/>
           </p:cNvPicPr>
           <p:nvPr/>
         </p:nvPicPr>
         <p:blipFill>
-          <a:blip r:embed="rId1"/>
+          <a:blip r:embed="rId3"/>
           <a:stretch>
             <a:fillRect/>
           </a:stretch>
@@ -4594,7 +4243,7 @@
           </a:bodyPr>
           <a:lstStyle/>
           <a:p>
-            <a:pPr algn="l" indent="0" marL="0">
+            <a:pPr marL="0" indent="0" algn="l">
               <a:lnSpc>
                 <a:spcPct val="127000"/>
               </a:lnSpc>
@@ -4617,7 +4266,7 @@
             <a:endParaRPr lang="en-US" sz="1300" dirty="0"/>
           </a:p>
           <a:p>
-            <a:pPr algn="l" indent="0" marL="0">
+            <a:pPr marL="0" indent="0" algn="l">
               <a:lnSpc>
                 <a:spcPct val="127000"/>
               </a:lnSpc>
@@ -4634,12 +4283,6 @@
               </a:rPr>
               <a:t>«</a:t>
             </a:r>
-            <a:pPr algn="l" indent="0" marL="0">
-              <a:lnSpc>
-                <a:spcPct val="127000"/>
-              </a:lnSpc>
-              <a:buNone/>
-            </a:pPr>
             <a:r>
               <a:rPr lang="en-US" sz="1300" b="1" dirty="0">
                 <a:solidFill>
@@ -4651,12 +4294,6 @@
               </a:rPr>
               <a:t>Активный клиент</a:t>
             </a:r>
-            <a:pPr algn="l" indent="0" marL="0">
-              <a:lnSpc>
-                <a:spcPct val="127000"/>
-              </a:lnSpc>
-              <a:buNone/>
-            </a:pPr>
             <a:r>
               <a:rPr lang="en-US" sz="1300" dirty="0">
                 <a:solidFill>
@@ -4696,14 +4333,14 @@
       </p:sp>
       <p:pic>
         <p:nvPicPr>
-          <p:cNvPr id="6" name="Image 1" descr="preencoded.png">    </p:cNvPr>
+          <p:cNvPr id="6" name="Image 1" descr="preencoded.png"/>
           <p:cNvPicPr>
             <a:picLocks noChangeAspect="1"/>
           </p:cNvPicPr>
           <p:nvPr/>
         </p:nvPicPr>
         <p:blipFill>
-          <a:blip r:embed="rId2"/>
+          <a:blip r:embed="rId4"/>
           <a:stretch>
             <a:fillRect/>
           </a:stretch>
@@ -4741,7 +4378,7 @@
           </a:bodyPr>
           <a:lstStyle/>
           <a:p>
-            <a:pPr algn="l" indent="0" marL="0">
+            <a:pPr marL="0" indent="0" algn="l">
               <a:lnSpc>
                 <a:spcPct val="127000"/>
               </a:lnSpc>
@@ -4758,12 +4395,6 @@
               </a:rPr>
               <a:t>Важные понятия должны использоваться </a:t>
             </a:r>
-            <a:pPr algn="l" indent="0" marL="0">
-              <a:lnSpc>
-                <a:spcPct val="127000"/>
-              </a:lnSpc>
-              <a:buNone/>
-            </a:pPr>
             <a:r>
               <a:rPr lang="en-US" sz="1300" b="1" dirty="0">
                 <a:solidFill>
@@ -4775,12 +4406,6 @@
               </a:rPr>
               <a:t>последовательно</a:t>
             </a:r>
-            <a:pPr algn="l" indent="0" marL="0">
-              <a:lnSpc>
-                <a:spcPct val="127000"/>
-              </a:lnSpc>
-              <a:buNone/>
-            </a:pPr>
             <a:r>
               <a:rPr lang="en-US" sz="1300" dirty="0">
                 <a:solidFill>
@@ -4844,7 +4469,7 @@
           </a:bodyPr>
           <a:lstStyle/>
           <a:p>
-            <a:pPr algn="l" indent="0" marL="0">
+            <a:pPr marL="0" indent="0" algn="l">
               <a:lnSpc>
                 <a:spcPct val="104000"/>
               </a:lnSpc>
@@ -4888,7 +4513,7 @@
           </a:bodyPr>
           <a:lstStyle/>
           <a:p>
-            <a:pPr algn="l" indent="0" marL="0">
+            <a:pPr marL="0" indent="0" algn="l">
               <a:lnSpc>
                 <a:spcPct val="133000"/>
               </a:lnSpc>
@@ -4932,7 +4557,7 @@
           </a:bodyPr>
           <a:lstStyle/>
           <a:p>
-            <a:pPr algn="l" indent="0" marL="0">
+            <a:pPr marL="0" indent="0" algn="l">
               <a:lnSpc>
                 <a:spcPct val="133000"/>
               </a:lnSpc>
@@ -4949,12 +4574,6 @@
               </a:rPr>
               <a:t>«Скидка для постоянных клиентов </a:t>
             </a:r>
-            <a:pPr algn="l" indent="0" marL="0">
-              <a:lnSpc>
-                <a:spcPct val="133000"/>
-              </a:lnSpc>
-              <a:buNone/>
-            </a:pPr>
             <a:r>
               <a:rPr lang="en-US" sz="1450" b="1" dirty="0">
                 <a:solidFill>
@@ -4966,12 +4585,6 @@
               </a:rPr>
               <a:t>и</a:t>
             </a:r>
-            <a:pPr algn="l" indent="0" marL="0">
-              <a:lnSpc>
-                <a:spcPct val="133000"/>
-              </a:lnSpc>
-              <a:buNone/>
-            </a:pPr>
             <a:r>
               <a:rPr lang="en-US" sz="1450" dirty="0">
                 <a:solidFill>
@@ -5032,7 +4645,7 @@
           </a:bodyPr>
           <a:lstStyle/>
           <a:p>
-            <a:pPr algn="l" indent="0" marL="0">
+            <a:pPr marL="0" indent="0" algn="l">
               <a:lnSpc>
                 <a:spcPct val="133000"/>
               </a:lnSpc>
@@ -5101,7 +4714,7 @@
           <a:bodyPr wrap="none" lIns="0" tIns="0" rIns="0" bIns="0" rtlCol="0" anchor="t"/>
           <a:lstStyle/>
           <a:p>
-            <a:pPr algn="l" indent="0" marL="0">
+            <a:pPr marL="0" indent="0" algn="l">
               <a:lnSpc>
                 <a:spcPct val="104000"/>
               </a:lnSpc>
@@ -5145,7 +4758,7 @@
           </a:bodyPr>
           <a:lstStyle/>
           <a:p>
-            <a:pPr algn="l" indent="0" marL="0">
+            <a:pPr marL="0" indent="0" algn="l">
               <a:lnSpc>
                 <a:spcPct val="133000"/>
               </a:lnSpc>
@@ -5162,12 +4775,6 @@
               </a:rPr>
               <a:t>Скидка = постоянный клиент </a:t>
             </a:r>
-            <a:pPr algn="l" indent="0" marL="0">
-              <a:lnSpc>
-                <a:spcPct val="133000"/>
-              </a:lnSpc>
-              <a:buNone/>
-            </a:pPr>
             <a:r>
               <a:rPr lang="en-US" sz="1450" b="1" dirty="0">
                 <a:solidFill>
@@ -5179,12 +4786,6 @@
               </a:rPr>
               <a:t>ИЛИ</a:t>
             </a:r>
-            <a:pPr algn="l" indent="0" marL="0">
-              <a:lnSpc>
-                <a:spcPct val="133000"/>
-              </a:lnSpc>
-              <a:buNone/>
-            </a:pPr>
             <a:r>
               <a:rPr lang="en-US" sz="1450" dirty="0">
                 <a:solidFill>
@@ -5248,7 +4849,7 @@
           <a:bodyPr wrap="none" lIns="0" tIns="0" rIns="0" bIns="0" rtlCol="0" anchor="t"/>
           <a:lstStyle/>
           <a:p>
-            <a:pPr algn="l" indent="0" marL="0">
+            <a:pPr marL="0" indent="0" algn="l">
               <a:lnSpc>
                 <a:spcPct val="104000"/>
               </a:lnSpc>
@@ -5292,7 +4893,7 @@
           </a:bodyPr>
           <a:lstStyle/>
           <a:p>
-            <a:pPr algn="l" indent="0" marL="0">
+            <a:pPr marL="0" indent="0" algn="l">
               <a:lnSpc>
                 <a:spcPct val="133000"/>
               </a:lnSpc>
@@ -5309,12 +4910,6 @@
               </a:rPr>
               <a:t>Скидка = постоянный клиент </a:t>
             </a:r>
-            <a:pPr algn="l" indent="0" marL="0">
-              <a:lnSpc>
-                <a:spcPct val="133000"/>
-              </a:lnSpc>
-              <a:buNone/>
-            </a:pPr>
             <a:r>
               <a:rPr lang="en-US" sz="1450" b="1" dirty="0">
                 <a:solidFill>
@@ -5326,12 +4921,6 @@
               </a:rPr>
               <a:t>И</a:t>
             </a:r>
-            <a:pPr algn="l" indent="0" marL="0">
-              <a:lnSpc>
-                <a:spcPct val="133000"/>
-              </a:lnSpc>
-              <a:buNone/>
-            </a:pPr>
             <a:r>
               <a:rPr lang="en-US" sz="1450" dirty="0">
                 <a:solidFill>
@@ -5394,14 +4983,14 @@
       </p:sp>
       <p:pic>
         <p:nvPicPr>
-          <p:cNvPr id="3" name="Image 0" descr="preencoded.png">    </p:cNvPr>
+          <p:cNvPr id="3" name="Image 0" descr="preencoded.png"/>
           <p:cNvPicPr>
             <a:picLocks noChangeAspect="1"/>
           </p:cNvPicPr>
           <p:nvPr/>
         </p:nvPicPr>
         <p:blipFill>
-          <a:blip r:embed="rId1"/>
+          <a:blip r:embed="rId3"/>
           <a:stretch>
             <a:fillRect/>
           </a:stretch>
@@ -5439,7 +5028,7 @@
           </a:bodyPr>
           <a:lstStyle/>
           <a:p>
-            <a:pPr algn="l" indent="0" marL="0">
+            <a:pPr marL="0" indent="0" algn="l">
               <a:lnSpc>
                 <a:spcPct val="104000"/>
               </a:lnSpc>
@@ -5483,7 +5072,7 @@
           </a:bodyPr>
           <a:lstStyle/>
           <a:p>
-            <a:pPr algn="l" indent="0" marL="0">
+            <a:pPr marL="0" indent="0" algn="l">
               <a:lnSpc>
                 <a:spcPct val="120000"/>
               </a:lnSpc>
@@ -5506,17 +5095,17 @@
       </p:sp>
       <p:pic>
         <p:nvPicPr>
-          <p:cNvPr id="6" name="Image 1" descr="preencoded.png">    </p:cNvPr>
+          <p:cNvPr id="6" name="Image 1" descr="preencoded.png"/>
           <p:cNvPicPr>
             <a:picLocks noChangeAspect="1"/>
           </p:cNvPicPr>
           <p:nvPr/>
         </p:nvPicPr>
         <p:blipFill>
-          <a:blip r:embed="rId2">
+          <a:blip>
             <a:extLst>
               <a:ext uri="{96DAC541-7B7A-43D3-8B79-37D633B846F1}">
-                <asvg:svgBlip xmlns:asvg="http://schemas.microsoft.com/office/drawing/2016/SVG/main" r:embed="rId3"/>
+                <asvg:svgBlip xmlns:asvg="http://schemas.microsoft.com/office/drawing/2016/SVG/main" r:embed="rId4"/>
               </a:ext>
             </a:extLst>
           </a:blip>
@@ -5555,7 +5144,7 @@
           <a:bodyPr wrap="none" lIns="0" tIns="0" rIns="0" bIns="0" rtlCol="0" anchor="t"/>
           <a:lstStyle/>
           <a:p>
-            <a:pPr algn="l" indent="0" marL="0">
+            <a:pPr marL="0" indent="0" algn="l">
               <a:lnSpc>
                 <a:spcPct val="104000"/>
               </a:lnSpc>
@@ -5597,7 +5186,7 @@
           <a:bodyPr wrap="none" lIns="0" tIns="0" rIns="0" bIns="0" rtlCol="0" anchor="t"/>
           <a:lstStyle/>
           <a:p>
-            <a:pPr algn="l" indent="0" marL="0">
+            <a:pPr marL="0" indent="0" algn="l">
               <a:lnSpc>
                 <a:spcPct val="120000"/>
               </a:lnSpc>
@@ -5620,14 +5209,128 @@
       </p:sp>
       <p:pic>
         <p:nvPicPr>
-          <p:cNvPr id="9" name="Image 2" descr="preencoded.png">    </p:cNvPr>
+          <p:cNvPr id="9" name="Image 2" descr="preencoded.png"/>
           <p:cNvPicPr>
             <a:picLocks noChangeAspect="1"/>
           </p:cNvPicPr>
           <p:nvPr/>
         </p:nvPicPr>
         <p:blipFill>
-          <a:blip r:embed="rId4">
+          <a:blip>
+            <a:extLst>
+              <a:ext uri="{96DAC541-7B7A-43D3-8B79-37D633B846F1}">
+                <asvg:svgBlip xmlns:asvg="http://schemas.microsoft.com/office/drawing/2016/SVG/main" r:embed="rId4"/>
+              </a:ext>
+            </a:extLst>
+          </a:blip>
+          <a:stretch>
+            <a:fillRect/>
+          </a:stretch>
+        </p:blipFill>
+        <p:spPr>
+          <a:xfrm>
+            <a:off x="5233360" y="3971727"/>
+            <a:ext cx="6296860" cy="866973"/>
+          </a:xfrm>
+          <a:prstGeom prst="rect">
+            <a:avLst/>
+          </a:prstGeom>
+        </p:spPr>
+      </p:pic>
+      <p:sp>
+        <p:nvSpPr>
+          <p:cNvPr id="10" name="Text 5"/>
+          <p:cNvSpPr/>
+          <p:nvPr/>
+        </p:nvSpPr>
+        <p:spPr>
+          <a:xfrm>
+            <a:off x="5479814" y="4141986"/>
+            <a:ext cx="5880151" cy="236240"/>
+          </a:xfrm>
+          <a:prstGeom prst="rect">
+            <a:avLst/>
+          </a:prstGeom>
+          <a:noFill/>
+          <a:ln/>
+        </p:spPr>
+        <p:txBody>
+          <a:bodyPr wrap="none" lIns="0" tIns="0" rIns="0" bIns="0" rtlCol="0" anchor="t"/>
+          <a:lstStyle/>
+          <a:p>
+            <a:pPr marL="0" indent="0" algn="l">
+              <a:lnSpc>
+                <a:spcPct val="104000"/>
+              </a:lnSpc>
+              <a:buNone/>
+            </a:pPr>
+            <a:r>
+              <a:rPr lang="en-US" sz="1450" b="1" dirty="0">
+                <a:solidFill>
+                  <a:srgbClr val="000000"/>
+                </a:solidFill>
+                <a:latin typeface="Montserrat Bold" pitchFamily="34" charset="0"/>
+                <a:ea typeface="Montserrat Bold" pitchFamily="34" charset="-122"/>
+                <a:cs typeface="Montserrat Bold" pitchFamily="34" charset="-120"/>
+              </a:rPr>
+              <a:t>Требование 2</a:t>
+            </a:r>
+            <a:endParaRPr lang="en-US" sz="1450" dirty="0"/>
+          </a:p>
+        </p:txBody>
+      </p:sp>
+      <p:sp>
+        <p:nvSpPr>
+          <p:cNvPr id="11" name="Text 6"/>
+          <p:cNvSpPr/>
+          <p:nvPr/>
+        </p:nvSpPr>
+        <p:spPr>
+          <a:xfrm>
+            <a:off x="5479814" y="4450755"/>
+            <a:ext cx="5880151" cy="217686"/>
+          </a:xfrm>
+          <a:prstGeom prst="rect">
+            <a:avLst/>
+          </a:prstGeom>
+          <a:noFill/>
+          <a:ln/>
+        </p:spPr>
+        <p:txBody>
+          <a:bodyPr wrap="none" lIns="0" tIns="0" rIns="0" bIns="0" rtlCol="0" anchor="t"/>
+          <a:lstStyle/>
+          <a:p>
+            <a:pPr marL="0" indent="0" algn="l">
+              <a:lnSpc>
+                <a:spcPct val="120000"/>
+              </a:lnSpc>
+              <a:buNone/>
+            </a:pPr>
+            <a:r>
+              <a:rPr lang="en-US" sz="1150" dirty="0">
+                <a:solidFill>
+                  <a:srgbClr val="000000"/>
+                </a:solidFill>
+                <a:latin typeface="Open Sans" pitchFamily="34" charset="0"/>
+                <a:ea typeface="Open Sans" pitchFamily="34" charset="-122"/>
+                <a:cs typeface="Open Sans" pitchFamily="34" charset="-120"/>
+              </a:rPr>
+              <a:t>«После оплаты отмена заказа запрещена.»</a:t>
+            </a:r>
+            <a:endParaRPr lang="en-US" sz="1150" dirty="0"/>
+          </a:p>
+        </p:txBody>
+      </p:sp>
+      <p:pic>
+        <p:nvPicPr>
+          <p:cNvPr id="12" name="Image 3" descr="preencoded.png"/>
+          <p:cNvPicPr>
+            <a:picLocks noChangeAspect="1"/>
+          </p:cNvPicPr>
+          <p:nvPr/>
+        </p:nvPicPr>
+        <p:blipFill>
+          <a:blip>
             <a:extLst>
               <a:ext uri="{96DAC541-7B7A-43D3-8B79-37D633B846F1}">
                 <asvg:svgBlip xmlns:asvg="http://schemas.microsoft.com/office/drawing/2016/SVG/main" r:embed="rId5"/>
@@ -5640,8 +5343,8 @@
         </p:blipFill>
         <p:spPr>
           <a:xfrm>
-            <a:off x="5233360" y="3971727"/>
-            <a:ext cx="6296860" cy="866973"/>
+            <a:off x="5233360" y="4959648"/>
+            <a:ext cx="6296860" cy="1084659"/>
           </a:xfrm>
           <a:prstGeom prst="rect">
             <a:avLst/>
@@ -5650,13 +5353,13 @@
       </p:pic>
       <p:sp>
         <p:nvSpPr>
-          <p:cNvPr id="10" name="Text 5"/>
-          <p:cNvSpPr/>
-          <p:nvPr/>
-        </p:nvSpPr>
-        <p:spPr>
-          <a:xfrm>
-            <a:off x="5479814" y="4141986"/>
+          <p:cNvPr id="13" name="Text 7"/>
+          <p:cNvSpPr/>
+          <p:nvPr/>
+        </p:nvSpPr>
+        <p:spPr>
+          <a:xfrm>
+            <a:off x="5479814" y="5129907"/>
             <a:ext cx="5880151" cy="236240"/>
           </a:xfrm>
           <a:prstGeom prst="rect">
@@ -5669,12 +5372,23 @@
           <a:bodyPr wrap="none" lIns="0" tIns="0" rIns="0" bIns="0" rtlCol="0" anchor="t"/>
           <a:lstStyle/>
           <a:p>
-            <a:pPr algn="l" indent="0" marL="0">
+            <a:pPr marL="0" indent="0" algn="l">
               <a:lnSpc>
                 <a:spcPct val="104000"/>
               </a:lnSpc>
               <a:buNone/>
             </a:pPr>
+            <a:r>
+              <a:rPr lang="en-US" sz="1450" b="1" dirty="0">
+                <a:solidFill>
+                  <a:srgbClr val="000000"/>
+                </a:solidFill>
+                <a:latin typeface="Noto Color Emoji" pitchFamily="34" charset="0"/>
+                <a:ea typeface="Noto Color Emoji" pitchFamily="34" charset="-122"/>
+                <a:cs typeface="Noto Color Emoji" pitchFamily="34" charset="-120"/>
+              </a:rPr>
+              <a:t>⚠️</a:t>
+            </a:r>
             <a:r>
               <a:rPr lang="en-US" sz="1450" b="1" dirty="0">
                 <a:solidFill>
@@ -5684,137 +5398,6 @@
                 <a:ea typeface="Montserrat Bold" pitchFamily="34" charset="-122"/>
                 <a:cs typeface="Montserrat Bold" pitchFamily="34" charset="-120"/>
               </a:rPr>
-              <a:t>Требование 2</a:t>
-            </a:r>
-            <a:endParaRPr lang="en-US" sz="1450" dirty="0"/>
-          </a:p>
-        </p:txBody>
-      </p:sp>
-      <p:sp>
-        <p:nvSpPr>
-          <p:cNvPr id="11" name="Text 6"/>
-          <p:cNvSpPr/>
-          <p:nvPr/>
-        </p:nvSpPr>
-        <p:spPr>
-          <a:xfrm>
-            <a:off x="5479814" y="4450755"/>
-            <a:ext cx="5880151" cy="217686"/>
-          </a:xfrm>
-          <a:prstGeom prst="rect">
-            <a:avLst/>
-          </a:prstGeom>
-          <a:noFill/>
-          <a:ln/>
-        </p:spPr>
-        <p:txBody>
-          <a:bodyPr wrap="none" lIns="0" tIns="0" rIns="0" bIns="0" rtlCol="0" anchor="t"/>
-          <a:lstStyle/>
-          <a:p>
-            <a:pPr algn="l" indent="0" marL="0">
-              <a:lnSpc>
-                <a:spcPct val="120000"/>
-              </a:lnSpc>
-              <a:buNone/>
-            </a:pPr>
-            <a:r>
-              <a:rPr lang="en-US" sz="1150" dirty="0">
-                <a:solidFill>
-                  <a:srgbClr val="000000"/>
-                </a:solidFill>
-                <a:latin typeface="Open Sans" pitchFamily="34" charset="0"/>
-                <a:ea typeface="Open Sans" pitchFamily="34" charset="-122"/>
-                <a:cs typeface="Open Sans" pitchFamily="34" charset="-120"/>
-              </a:rPr>
-              <a:t>«После оплаты отмена заказа запрещена.»</a:t>
-            </a:r>
-            <a:endParaRPr lang="en-US" sz="1150" dirty="0"/>
-          </a:p>
-        </p:txBody>
-      </p:sp>
-      <p:pic>
-        <p:nvPicPr>
-          <p:cNvPr id="12" name="Image 3" descr="preencoded.png">    </p:cNvPr>
-          <p:cNvPicPr>
-            <a:picLocks noChangeAspect="1"/>
-          </p:cNvPicPr>
-          <p:nvPr/>
-        </p:nvPicPr>
-        <p:blipFill>
-          <a:blip r:embed="rId6">
-            <a:extLst>
-              <a:ext uri="{96DAC541-7B7A-43D3-8B79-37D633B846F1}">
-                <asvg:svgBlip xmlns:asvg="http://schemas.microsoft.com/office/drawing/2016/SVG/main" r:embed="rId7"/>
-              </a:ext>
-            </a:extLst>
-          </a:blip>
-          <a:stretch>
-            <a:fillRect/>
-          </a:stretch>
-        </p:blipFill>
-        <p:spPr>
-          <a:xfrm>
-            <a:off x="5233360" y="4959648"/>
-            <a:ext cx="6296860" cy="1084659"/>
-          </a:xfrm>
-          <a:prstGeom prst="rect">
-            <a:avLst/>
-          </a:prstGeom>
-        </p:spPr>
-      </p:pic>
-      <p:sp>
-        <p:nvSpPr>
-          <p:cNvPr id="13" name="Text 7"/>
-          <p:cNvSpPr/>
-          <p:nvPr/>
-        </p:nvSpPr>
-        <p:spPr>
-          <a:xfrm>
-            <a:off x="5479814" y="5129907"/>
-            <a:ext cx="5880151" cy="236240"/>
-          </a:xfrm>
-          <a:prstGeom prst="rect">
-            <a:avLst/>
-          </a:prstGeom>
-          <a:noFill/>
-          <a:ln/>
-        </p:spPr>
-        <p:txBody>
-          <a:bodyPr wrap="none" lIns="0" tIns="0" rIns="0" bIns="0" rtlCol="0" anchor="t"/>
-          <a:lstStyle/>
-          <a:p>
-            <a:pPr algn="l" indent="0" marL="0">
-              <a:lnSpc>
-                <a:spcPct val="104000"/>
-              </a:lnSpc>
-              <a:buNone/>
-            </a:pPr>
-            <a:r>
-              <a:rPr lang="en-US" sz="1450" b="1" dirty="0">
-                <a:solidFill>
-                  <a:srgbClr val="000000"/>
-                </a:solidFill>
-                <a:latin typeface="Noto Color Emoji" pitchFamily="34" charset="0"/>
-                <a:ea typeface="Noto Color Emoji" pitchFamily="34" charset="-122"/>
-                <a:cs typeface="Noto Color Emoji" pitchFamily="34" charset="-120"/>
-              </a:rPr>
-              <a:t>⚠️</a:t>
-            </a:r>
-            <a:pPr algn="l" indent="0" marL="0">
-              <a:lnSpc>
-                <a:spcPct val="104000"/>
-              </a:lnSpc>
-              <a:buNone/>
-            </a:pPr>
-            <a:r>
-              <a:rPr lang="en-US" sz="1450" b="1" dirty="0">
-                <a:solidFill>
-                  <a:srgbClr val="000000"/>
-                </a:solidFill>
-                <a:latin typeface="Montserrat Bold" pitchFamily="34" charset="0"/>
-                <a:ea typeface="Montserrat Bold" pitchFamily="34" charset="-122"/>
-                <a:cs typeface="Montserrat Bold" pitchFamily="34" charset="-120"/>
-              </a:rPr>
               <a:t> Конфликт</a:t>
             </a:r>
             <a:endParaRPr lang="en-US" sz="1450" dirty="0"/>
@@ -5844,7 +5427,7 @@
           </a:bodyPr>
           <a:lstStyle/>
           <a:p>
-            <a:pPr algn="l" indent="0" marL="0">
+            <a:pPr marL="0" indent="0" algn="l">
               <a:lnSpc>
                 <a:spcPct val="120000"/>
               </a:lnSpc>
@@ -5911,7 +5494,7 @@
           <a:bodyPr wrap="none" lIns="0" tIns="0" rIns="0" bIns="0" rtlCol="0" anchor="t"/>
           <a:lstStyle/>
           <a:p>
-            <a:pPr algn="l" indent="0" marL="0">
+            <a:pPr marL="0" indent="0" algn="l">
               <a:lnSpc>
                 <a:spcPct val="104000"/>
               </a:lnSpc>
@@ -5955,7 +5538,7 @@
           </a:bodyPr>
           <a:lstStyle/>
           <a:p>
-            <a:pPr algn="l" indent="0" marL="0">
+            <a:pPr marL="0" indent="0" algn="l">
               <a:lnSpc>
                 <a:spcPct val="123000"/>
               </a:lnSpc>
@@ -6000,14 +5583,14 @@
       </p:sp>
       <p:pic>
         <p:nvPicPr>
-          <p:cNvPr id="5" name="Image 0" descr="preencoded.png">    </p:cNvPr>
+          <p:cNvPr id="5" name="Image 0" descr="preencoded.png"/>
           <p:cNvPicPr>
             <a:picLocks noChangeAspect="1"/>
           </p:cNvPicPr>
           <p:nvPr/>
         </p:nvPicPr>
         <p:blipFill>
-          <a:blip r:embed="rId1"/>
+          <a:blip r:embed="rId3"/>
           <a:stretch>
             <a:fillRect/>
           </a:stretch>
@@ -6043,7 +5626,7 @@
           <a:bodyPr wrap="none" lIns="0" tIns="0" rIns="0" bIns="0" rtlCol="0" anchor="t"/>
           <a:lstStyle/>
           <a:p>
-            <a:pPr algn="l" indent="0" marL="0">
+            <a:pPr marL="0" indent="0" algn="l">
               <a:lnSpc>
                 <a:spcPct val="123000"/>
               </a:lnSpc>
@@ -6093,17 +5676,17 @@
       </p:sp>
       <p:pic>
         <p:nvPicPr>
-          <p:cNvPr id="8" name="Image 1" descr="preencoded.png">    </p:cNvPr>
+          <p:cNvPr id="8" name="Image 1" descr="preencoded.png"/>
           <p:cNvPicPr>
             <a:picLocks noChangeAspect="1"/>
           </p:cNvPicPr>
           <p:nvPr/>
         </p:nvPicPr>
         <p:blipFill>
-          <a:blip r:embed="rId2">
+          <a:blip>
             <a:extLst>
               <a:ext uri="{96DAC541-7B7A-43D3-8B79-37D633B846F1}">
-                <asvg:svgBlip xmlns:asvg="http://schemas.microsoft.com/office/drawing/2016/SVG/main" r:embed="rId3"/>
+                <asvg:svgBlip xmlns:asvg="http://schemas.microsoft.com/office/drawing/2016/SVG/main" r:embed="rId4"/>
               </a:ext>
             </a:extLst>
           </a:blip>
@@ -6142,7 +5725,7 @@
           <a:bodyPr wrap="none" lIns="0" tIns="0" rIns="0" bIns="0" rtlCol="0" anchor="t"/>
           <a:lstStyle/>
           <a:p>
-            <a:pPr algn="l" indent="0" marL="0">
+            <a:pPr marL="0" indent="0" algn="l">
               <a:lnSpc>
                 <a:spcPct val="104000"/>
               </a:lnSpc>
@@ -6184,7 +5767,7 @@
           <a:bodyPr wrap="none" lIns="0" tIns="0" rIns="0" bIns="0" rtlCol="0" anchor="t"/>
           <a:lstStyle/>
           <a:p>
-            <a:pPr algn="l" indent="0" marL="0">
+            <a:pPr marL="0" indent="0" algn="l">
               <a:lnSpc>
                 <a:spcPct val="123000"/>
               </a:lnSpc>
@@ -6234,14 +5817,14 @@
       </p:sp>
       <p:pic>
         <p:nvPicPr>
-          <p:cNvPr id="12" name="Image 2" descr="preencoded.png">    </p:cNvPr>
+          <p:cNvPr id="12" name="Image 2" descr="preencoded.png"/>
           <p:cNvPicPr>
             <a:picLocks noChangeAspect="1"/>
           </p:cNvPicPr>
           <p:nvPr/>
         </p:nvPicPr>
         <p:blipFill>
-          <a:blip r:embed="rId4">
+          <a:blip>
             <a:extLst>
               <a:ext uri="{96DAC541-7B7A-43D3-8B79-37D633B846F1}">
                 <asvg:svgBlip xmlns:asvg="http://schemas.microsoft.com/office/drawing/2016/SVG/main" r:embed="rId5"/>
@@ -6283,7 +5866,7 @@
           <a:bodyPr wrap="none" lIns="0" tIns="0" rIns="0" bIns="0" rtlCol="0" anchor="t"/>
           <a:lstStyle/>
           <a:p>
-            <a:pPr algn="l" indent="0" marL="0">
+            <a:pPr marL="0" indent="0" algn="l">
               <a:lnSpc>
                 <a:spcPct val="104000"/>
               </a:lnSpc>
@@ -6327,7 +5910,7 @@
           </a:bodyPr>
           <a:lstStyle/>
           <a:p>
-            <a:pPr algn="l" indent="0" marL="0">
+            <a:pPr marL="0" indent="0" algn="l">
               <a:lnSpc>
                 <a:spcPct val="123000"/>
               </a:lnSpc>
@@ -6377,17 +5960,17 @@
       </p:sp>
       <p:pic>
         <p:nvPicPr>
-          <p:cNvPr id="16" name="Image 3" descr="preencoded.png">    </p:cNvPr>
+          <p:cNvPr id="16" name="Image 3" descr="preencoded.png"/>
           <p:cNvPicPr>
             <a:picLocks noChangeAspect="1"/>
           </p:cNvPicPr>
           <p:nvPr/>
         </p:nvPicPr>
         <p:blipFill>
-          <a:blip r:embed="rId6">
+          <a:blip>
             <a:extLst>
               <a:ext uri="{96DAC541-7B7A-43D3-8B79-37D633B846F1}">
-                <asvg:svgBlip xmlns:asvg="http://schemas.microsoft.com/office/drawing/2016/SVG/main" r:embed="rId7"/>
+                <asvg:svgBlip xmlns:asvg="http://schemas.microsoft.com/office/drawing/2016/SVG/main" r:embed="rId6"/>
               </a:ext>
             </a:extLst>
           </a:blip>
@@ -6426,7 +6009,7 @@
           <a:bodyPr wrap="none" lIns="0" tIns="0" rIns="0" bIns="0" rtlCol="0" anchor="t"/>
           <a:lstStyle/>
           <a:p>
-            <a:pPr algn="l" indent="0" marL="0">
+            <a:pPr marL="0" indent="0" algn="l">
               <a:lnSpc>
                 <a:spcPct val="104000"/>
               </a:lnSpc>
@@ -6468,7 +6051,7 @@
           <a:bodyPr wrap="none" lIns="0" tIns="0" rIns="0" bIns="0" rtlCol="0" anchor="t"/>
           <a:lstStyle/>
           <a:p>
-            <a:pPr algn="l" indent="0" marL="0">
+            <a:pPr marL="0" indent="0" algn="l">
               <a:lnSpc>
                 <a:spcPct val="123000"/>
               </a:lnSpc>
@@ -6790,4 +6373,299 @@
     </a:ext>
   </a:extLst>
 </a:theme>
+</file>
+
+<file path=ppt/theme/theme2.xml><?xml version="1.0" encoding="utf-8"?>
+<a:theme xmlns:a="http://schemas.openxmlformats.org/drawingml/2006/main" name="Тема Office">
+  <a:themeElements>
+    <a:clrScheme name="Стандартная">
+      <a:dk1>
+        <a:sysClr val="windowText" lastClr="000000"/>
+      </a:dk1>
+      <a:lt1>
+        <a:sysClr val="window" lastClr="FFFFFF"/>
+      </a:lt1>
+      <a:dk2>
+        <a:srgbClr val="44546A"/>
+      </a:dk2>
+      <a:lt2>
+        <a:srgbClr val="E7E6E6"/>
+      </a:lt2>
+      <a:accent1>
+        <a:srgbClr val="4472C4"/>
+      </a:accent1>
+      <a:accent2>
+        <a:srgbClr val="ED7D31"/>
+      </a:accent2>
+      <a:accent3>
+        <a:srgbClr val="A5A5A5"/>
+      </a:accent3>
+      <a:accent4>
+        <a:srgbClr val="FFC000"/>
+      </a:accent4>
+      <a:accent5>
+        <a:srgbClr val="5B9BD5"/>
+      </a:accent5>
+      <a:accent6>
+        <a:srgbClr val="70AD47"/>
+      </a:accent6>
+      <a:hlink>
+        <a:srgbClr val="0563C1"/>
+      </a:hlink>
+      <a:folHlink>
+        <a:srgbClr val="954F72"/>
+      </a:folHlink>
+    </a:clrScheme>
+    <a:fontScheme name="Стандартная">
+      <a:majorFont>
+        <a:latin typeface="Calibri Light" panose="020F0302020204030204"/>
+        <a:ea typeface=""/>
+        <a:cs typeface=""/>
+        <a:font script="Jpan" typeface="游ゴシック Light"/>
+        <a:font script="Hang" typeface="맑은 고딕"/>
+        <a:font script="Hans" typeface="等线 Light"/>
+        <a:font script="Hant" typeface="新細明體"/>
+        <a:font script="Arab" typeface="Times New Roman"/>
+        <a:font script="Hebr" typeface="Times New Roman"/>
+        <a:font script="Thai" typeface="Angsana New"/>
+        <a:font script="Ethi" typeface="Nyala"/>
+        <a:font script="Beng" typeface="Vrinda"/>
+        <a:font script="Gujr" typeface="Shruti"/>
+        <a:font script="Khmr" typeface="MoolBoran"/>
+        <a:font script="Knda" typeface="Tunga"/>
+        <a:font script="Guru" typeface="Raavi"/>
+        <a:font script="Cans" typeface="Euphemia"/>
+        <a:font script="Cher" typeface="Plantagenet Cherokee"/>
+        <a:font script="Yiii" typeface="Microsoft Yi Baiti"/>
+        <a:font script="Tibt" typeface="Microsoft Himalaya"/>
+        <a:font script="Thaa" typeface="MV Boli"/>
+        <a:font script="Deva" typeface="Mangal"/>
+        <a:font script="Telu" typeface="Gautami"/>
+        <a:font script="Taml" typeface="Latha"/>
+        <a:font script="Syrc" typeface="Estrangelo Edessa"/>
+        <a:font script="Orya" typeface="Kalinga"/>
+        <a:font script="Mlym" typeface="Kartika"/>
+        <a:font script="Laoo" typeface="DokChampa"/>
+        <a:font script="Sinh" typeface="Iskoola Pota"/>
+        <a:font script="Mong" typeface="Mongolian Baiti"/>
+        <a:font script="Viet" typeface="Times New Roman"/>
+        <a:font script="Uigh" typeface="Microsoft Uighur"/>
+        <a:font script="Geor" typeface="Sylfaen"/>
+        <a:font script="Armn" typeface="Arial"/>
+        <a:font script="Bugi" typeface="Leelawadee UI"/>
+        <a:font script="Bopo" typeface="Microsoft JhengHei"/>
+        <a:font script="Java" typeface="Javanese Text"/>
+        <a:font script="Lisu" typeface="Segoe UI"/>
+        <a:font script="Mymr" typeface="Myanmar Text"/>
+        <a:font script="Nkoo" typeface="Ebrima"/>
+        <a:font script="Olck" typeface="Nirmala UI"/>
+        <a:font script="Osma" typeface="Ebrima"/>
+        <a:font script="Phag" typeface="Phagspa"/>
+        <a:font script="Syrn" typeface="Estrangelo Edessa"/>
+        <a:font script="Syrj" typeface="Estrangelo Edessa"/>
+        <a:font script="Syre" typeface="Estrangelo Edessa"/>
+        <a:font script="Sora" typeface="Nirmala UI"/>
+        <a:font script="Tale" typeface="Microsoft Tai Le"/>
+        <a:font script="Talu" typeface="Microsoft New Tai Lue"/>
+        <a:font script="Tfng" typeface="Ebrima"/>
+      </a:majorFont>
+      <a:minorFont>
+        <a:latin typeface="Calibri" panose="020F0502020204030204"/>
+        <a:ea typeface=""/>
+        <a:cs typeface=""/>
+        <a:font script="Jpan" typeface="游ゴシック"/>
+        <a:font script="Hang" typeface="맑은 고딕"/>
+        <a:font script="Hans" typeface="等线"/>
+        <a:font script="Hant" typeface="新細明體"/>
+        <a:font script="Arab" typeface="Arial"/>
+        <a:font script="Hebr" typeface="Arial"/>
+        <a:font script="Thai" typeface="Cordia New"/>
+        <a:font script="Ethi" typeface="Nyala"/>
+        <a:font script="Beng" typeface="Vrinda"/>
+        <a:font script="Gujr" typeface="Shruti"/>
+        <a:font script="Khmr" typeface="DaunPenh"/>
+        <a:font script="Knda" typeface="Tunga"/>
+        <a:font script="Guru" typeface="Raavi"/>
+        <a:font script="Cans" typeface="Euphemia"/>
+        <a:font script="Cher" typeface="Plantagenet Cherokee"/>
+        <a:font script="Yiii" typeface="Microsoft Yi Baiti"/>
+        <a:font script="Tibt" typeface="Microsoft Himalaya"/>
+        <a:font script="Thaa" typeface="MV Boli"/>
+        <a:font script="Deva" typeface="Mangal"/>
+        <a:font script="Telu" typeface="Gautami"/>
+        <a:font script="Taml" typeface="Latha"/>
+        <a:font script="Syrc" typeface="Estrangelo Edessa"/>
+        <a:font script="Orya" typeface="Kalinga"/>
+        <a:font script="Mlym" typeface="Kartika"/>
+        <a:font script="Laoo" typeface="DokChampa"/>
+        <a:font script="Sinh" typeface="Iskoola Pota"/>
+        <a:font script="Mong" typeface="Mongolian Baiti"/>
+        <a:font script="Viet" typeface="Arial"/>
+        <a:font script="Uigh" typeface="Microsoft Uighur"/>
+        <a:font script="Geor" typeface="Sylfaen"/>
+        <a:font script="Armn" typeface="Arial"/>
+        <a:font script="Bugi" typeface="Leelawadee UI"/>
+        <a:font script="Bopo" typeface="Microsoft JhengHei"/>
+        <a:font script="Java" typeface="Javanese Text"/>
+        <a:font script="Lisu" typeface="Segoe UI"/>
+        <a:font script="Mymr" typeface="Myanmar Text"/>
+        <a:font script="Nkoo" typeface="Ebrima"/>
+        <a:font script="Olck" typeface="Nirmala UI"/>
+        <a:font script="Osma" typeface="Ebrima"/>
+        <a:font script="Phag" typeface="Phagspa"/>
+        <a:font script="Syrn" typeface="Estrangelo Edessa"/>
+        <a:font script="Syrj" typeface="Estrangelo Edessa"/>
+        <a:font script="Syre" typeface="Estrangelo Edessa"/>
+        <a:font script="Sora" typeface="Nirmala UI"/>
+        <a:font script="Tale" typeface="Microsoft Tai Le"/>
+        <a:font script="Talu" typeface="Microsoft New Tai Lue"/>
+        <a:font script="Tfng" typeface="Ebrima"/>
+      </a:minorFont>
+    </a:fontScheme>
+    <a:fmtScheme name="Стандартная">
+      <a:fillStyleLst>
+        <a:solidFill>
+          <a:schemeClr val="phClr"/>
+        </a:solidFill>
+        <a:gradFill rotWithShape="1">
+          <a:gsLst>
+            <a:gs pos="0">
+              <a:schemeClr val="phClr">
+                <a:lumMod val="110000"/>
+                <a:satMod val="105000"/>
+                <a:tint val="67000"/>
+              </a:schemeClr>
+            </a:gs>
+            <a:gs pos="50000">
+              <a:schemeClr val="phClr">
+                <a:lumMod val="105000"/>
+                <a:satMod val="103000"/>
+                <a:tint val="73000"/>
+              </a:schemeClr>
+            </a:gs>
+            <a:gs pos="100000">
+              <a:schemeClr val="phClr">
+                <a:lumMod val="105000"/>
+                <a:satMod val="109000"/>
+                <a:tint val="81000"/>
+              </a:schemeClr>
+            </a:gs>
+          </a:gsLst>
+          <a:lin ang="5400000" scaled="0"/>
+        </a:gradFill>
+        <a:gradFill rotWithShape="1">
+          <a:gsLst>
+            <a:gs pos="0">
+              <a:schemeClr val="phClr">
+                <a:satMod val="103000"/>
+                <a:lumMod val="102000"/>
+                <a:tint val="94000"/>
+              </a:schemeClr>
+            </a:gs>
+            <a:gs pos="50000">
+              <a:schemeClr val="phClr">
+                <a:satMod val="110000"/>
+                <a:lumMod val="100000"/>
+                <a:shade val="100000"/>
+              </a:schemeClr>
+            </a:gs>
+            <a:gs pos="100000">
+              <a:schemeClr val="phClr">
+                <a:lumMod val="99000"/>
+                <a:satMod val="120000"/>
+                <a:shade val="78000"/>
+              </a:schemeClr>
+            </a:gs>
+          </a:gsLst>
+          <a:lin ang="5400000" scaled="0"/>
+        </a:gradFill>
+      </a:fillStyleLst>
+      <a:lnStyleLst>
+        <a:ln w="6350" cap="flat" cmpd="sng" algn="ctr">
+          <a:solidFill>
+            <a:schemeClr val="phClr"/>
+          </a:solidFill>
+          <a:prstDash val="solid"/>
+          <a:miter lim="800000"/>
+        </a:ln>
+        <a:ln w="12700" cap="flat" cmpd="sng" algn="ctr">
+          <a:solidFill>
+            <a:schemeClr val="phClr"/>
+          </a:solidFill>
+          <a:prstDash val="solid"/>
+          <a:miter lim="800000"/>
+        </a:ln>
+        <a:ln w="19050" cap="flat" cmpd="sng" algn="ctr">
+          <a:solidFill>
+            <a:schemeClr val="phClr"/>
+          </a:solidFill>
+          <a:prstDash val="solid"/>
+          <a:miter lim="800000"/>
+        </a:ln>
+      </a:lnStyleLst>
+      <a:effectStyleLst>
+        <a:effectStyle>
+          <a:effectLst/>
+        </a:effectStyle>
+        <a:effectStyle>
+          <a:effectLst/>
+        </a:effectStyle>
+        <a:effectStyle>
+          <a:effectLst>
+            <a:outerShdw blurRad="57150" dist="19050" dir="5400000" algn="ctr" rotWithShape="0">
+              <a:srgbClr val="000000">
+                <a:alpha val="63000"/>
+              </a:srgbClr>
+            </a:outerShdw>
+          </a:effectLst>
+        </a:effectStyle>
+      </a:effectStyleLst>
+      <a:bgFillStyleLst>
+        <a:solidFill>
+          <a:schemeClr val="phClr"/>
+        </a:solidFill>
+        <a:solidFill>
+          <a:schemeClr val="phClr">
+            <a:tint val="95000"/>
+            <a:satMod val="170000"/>
+          </a:schemeClr>
+        </a:solidFill>
+        <a:gradFill rotWithShape="1">
+          <a:gsLst>
+            <a:gs pos="0">
+              <a:schemeClr val="phClr">
+                <a:tint val="93000"/>
+                <a:satMod val="150000"/>
+                <a:shade val="98000"/>
+                <a:lumMod val="102000"/>
+              </a:schemeClr>
+            </a:gs>
+            <a:gs pos="50000">
+              <a:schemeClr val="phClr">
+                <a:tint val="98000"/>
+                <a:satMod val="130000"/>
+                <a:shade val="90000"/>
+                <a:lumMod val="103000"/>
+              </a:schemeClr>
+            </a:gs>
+            <a:gs pos="100000">
+              <a:schemeClr val="phClr">
+                <a:shade val="63000"/>
+                <a:satMod val="120000"/>
+              </a:schemeClr>
+            </a:gs>
+          </a:gsLst>
+          <a:lin ang="5400000" scaled="0"/>
+        </a:gradFill>
+      </a:bgFillStyleLst>
+    </a:fmtScheme>
+  </a:themeElements>
+  <a:objectDefaults/>
+  <a:extraClrSchemeLst/>
+  <a:extLst>
+    <a:ext uri="{05A4C25C-085E-4340-85A3-A5531E510DB2}">
+      <thm15:themeFamily xmlns:thm15="http://schemas.microsoft.com/office/thememl/2012/main" name="Office Theme" id="{62F939B6-93AF-4DB8-9C6B-D6C7DFDC589F}" vid="{4A3C46E8-61CC-4603-A589-7422A47A8E4A}"/>
+    </a:ext>
+  </a:extLst>
+</a:theme>
 </file>